--- a/ppt/lecture.pptx
+++ b/ppt/lecture.pptx
@@ -19,6 +19,7 @@
     <p:sldId id="267" r:id="rId19"/>
     <p:sldId id="268" r:id="rId20"/>
     <p:sldId id="269" r:id="rId21"/>
+    <p:sldId id="270" r:id="rId22"/>
   </p:sldIdLst>
   <p:sldSz cx="12191695" cy="6858000" type="screen4x3"/>
   <p:notesSz cx="6858000" cy="9144000"/>
@@ -644,113 +645,107 @@
           <a:lstStyle/>
           <a:p>
             <a:r>
-              <a:t>【实验结果】录制：调度对比 — 汤平之</a:t>
-            </a:r>
-          </a:p>
-          <a:p/>
-          <a:p>
-            <a:r>
-              <a:t>这是项目的核心结果，请大家仔细看图。</a:t>
-            </a:r>
-          </a:p>
-          <a:p/>
-          <a:p>
-            <a:r>
-              <a:t>柱状图分两组：上面是 24 个测试小时上的总未满足需求；</a:t>
-            </a:r>
-          </a:p>
-          <a:p>
-            <a:r>
-              <a:t>下面是空驶距离成本。</a:t>
-            </a:r>
-          </a:p>
-          <a:p>
-            <a:r>
-              <a:t>灰色是不调度、橙色是贪心、蓝色是 LP。</a:t>
-            </a:r>
-          </a:p>
-          <a:p/>
-          <a:p>
-            <a:r>
-              <a:t>第一个观察：蓝色和橙色在「未满足需求」上几乎重合，</a:t>
-            </a:r>
-          </a:p>
-          <a:p>
-            <a:r>
-              <a:t>都比灰色低很多。这说明在 $\lambda = 20$ 的设置下，</a:t>
-            </a:r>
-          </a:p>
-          <a:p>
-            <a:r>
-              <a:t>LP 和贪心都把能填的缺口都填了，差别不大。</a:t>
-            </a:r>
-          </a:p>
-          <a:p/>
-          <a:p>
-            <a:r>
-              <a:t>真正有意思的是 \emph{成本}——你看下面那张图：</a:t>
-            </a:r>
-          </a:p>
-          <a:p>
-            <a:r>
-              <a:t>在 hour 13、14、17、18、19 这几个小时上，</a:t>
-            </a:r>
-          </a:p>
-          <a:p>
-            <a:r>
-              <a:t>蓝色明显比橙色矮一大截。</a:t>
-            </a:r>
-          </a:p>
-          <a:p/>
-          <a:p>
-            <a:r>
-              <a:t>具体看一些数字：</a:t>
-            </a:r>
-          </a:p>
-          <a:p>
-            <a:r>
-              <a:t>hour 14，贪心要烧 5033 英里空驶，</a:t>
-            </a:r>
-          </a:p>
-          <a:p>
-            <a:r>
-              <a:t>LP 只需要 1540 英里，便宜了 3.3 倍；</a:t>
-            </a:r>
-          </a:p>
-          <a:p>
-            <a:r>
-              <a:t>hour 18，贪心 3197，LP 707，便宜了 4.5 倍；</a:t>
-            </a:r>
-          </a:p>
-          <a:p>
-            <a:r>
-              <a:t>hour 17，贪心 921，LP 429，便宜了 2.1 倍。</a:t>
-            </a:r>
-          </a:p>
-          <a:p/>
-          <a:p>
-            <a:r>
-              <a:t>这就是 LP \emph{全局最优} 相对贪心 \emph{局部贪婪} 的本质优势：</a:t>
-            </a:r>
-          </a:p>
-          <a:p>
-            <a:r>
-              <a:t>同样的服务水平下，LP 把调度路径全局重排到更便宜的 OD 对上，</a:t>
-            </a:r>
-          </a:p>
-          <a:p>
-            <a:r>
-              <a:t>而贪心因为按缺口大小逐个填，可能一开始就用了最便宜的路径，</a:t>
-            </a:r>
-          </a:p>
-          <a:p>
-            <a:r>
-              <a:t>留给后面的缺口的就只剩昂贵路径了。</a:t>
-            </a:r>
-          </a:p>
-          <a:p>
-            <a:r>
-              <a:t>这个结果在 24 个测试小时的总和上 \emph{稳定成立}。</a:t>
+              <a:t>【北太天元实现流程】录制：汤平之</a:t>
+            </a:r>
+          </a:p>
+          <a:p/>
+          <a:p>
+            <a:r>
+              <a:t>这一页我讲整个北太天元侧的实现流程，因为这是项目要求的主求解工具。</a:t>
+            </a:r>
+          </a:p>
+          <a:p/>
+          <a:p>
+            <a:r>
+              <a:t>整个流水线由 \verb|run_all.m| 一键串联，</a:t>
+            </a:r>
+          </a:p>
+          <a:p>
+            <a:r>
+              <a:t>大约 130 行代码，做了 12 件事：</a:t>
+            </a:r>
+          </a:p>
+          <a:p/>
+          <a:p>
+            <a:r>
+              <a:t>第一步，读取 Python 输出的 7 个 processed CSV，</a:t>
+            </a:r>
+          </a:p>
+          <a:p>
+            <a:r>
+              <a:t>包括 109,250 行的面板、50×50 的 cost 矩阵、zone 元信息等。</a:t>
+            </a:r>
+          </a:p>
+          <a:p>
+            <a:r>
+              <a:t>这一步有一个有意思的兼容性坑——Baltamatica 2025 社区版的</a:t>
+            </a:r>
+          </a:p>
+          <a:p>
+            <a:r>
+              <a:t>\verb|csvread| 在多行加尾部换行时会丢行而且数值错乱，</a:t>
+            </a:r>
+          </a:p>
+          <a:p>
+            <a:r>
+              <a:t>我们改用 \verb|fopen + fread + sscanf| 自实现快速读取，</a:t>
+            </a:r>
+          </a:p>
+          <a:p>
+            <a:r>
+              <a:t>比 \verb|readtable| 快 30 倍。这些踩坑过程都记在 \verb|docs/beita_usage_notes.md|。</a:t>
+            </a:r>
+          </a:p>
+          <a:p/>
+          <a:p>
+            <a:r>
+              <a:t>第二步是验证 train / val / test 切分是 70 / 15 / 15，</a:t>
+            </a:r>
+          </a:p>
+          <a:p>
+            <a:r>
+              <a:t>第三步同时拟合历史均值和 Ridge 两个预测器。</a:t>
+            </a:r>
+          </a:p>
+          <a:p>
+            <a:r>
+              <a:t>第四步对每个测试小时构造 $S, D, C$，</a:t>
+            </a:r>
+          </a:p>
+          <a:p>
+            <a:r>
+              <a:t>同时跑不调度、贪心、LP 三种方案。</a:t>
+            </a:r>
+          </a:p>
+          <a:p>
+            <a:r>
+              <a:t>第五步是 $\lambda$ 敏感性扫描，10 个 $\lambda$ 值。</a:t>
+            </a:r>
+          </a:p>
+          <a:p>
+            <a:r>
+              <a:t>第六步是 Monte Carlo 200 次需求扰动稳健性测试。</a:t>
+            </a:r>
+          </a:p>
+          <a:p>
+            <a:r>
+              <a:t>第七步把 5 张图所需的数据导出成 CSV，</a:t>
+            </a:r>
+          </a:p>
+          <a:p>
+            <a:r>
+              <a:t>交给 Python matplotlib 渲染最终 PNG。</a:t>
+            </a:r>
+          </a:p>
+          <a:p/>
+          <a:p>
+            <a:r>
+              <a:t>这一分工保证 \emph{所有数学和优化都在北太天元里}，</a:t>
+            </a:r>
+          </a:p>
+          <a:p>
+            <a:r>
+              <a:t>Python 只做像素渲染，完全符合作业要求。</a:t>
             </a:r>
           </a:p>
           <a:p/>
@@ -826,91 +821,128 @@
           <a:lstStyle/>
           <a:p>
             <a:r>
-              <a:t>【实验结果】录制：top flows — 汤平之</a:t>
-            </a:r>
-          </a:p>
-          <a:p/>
-          <a:p>
-            <a:r>
-              <a:t>这张图把 24 个测试小时的 LP 调度矩阵 $X^*$ 累加起来，</a:t>
-            </a:r>
-          </a:p>
-          <a:p>
-            <a:r>
-              <a:t>挑出流量最大的 15 条 OD 边。</a:t>
-            </a:r>
-          </a:p>
-          <a:p>
-            <a:r>
-              <a:t>横条左边是源 zone 名字，右边是目的 zone 名字。</a:t>
-            </a:r>
-          </a:p>
-          <a:p/>
-          <a:p>
-            <a:r>
-              <a:t>我们可以看到，前 5 条高频路径几乎全部是 Manhattan 内部住宅区往机场的方向：</a:t>
-            </a:r>
-          </a:p>
-          <a:p>
-            <a:r>
-              <a:t>Murray Hill → JFK 累计调度 778 单，</a:t>
-            </a:r>
-          </a:p>
-          <a:p>
-            <a:r>
-              <a:t>Yorkville East → LaGuardia 553 单，</a:t>
-            </a:r>
-          </a:p>
-          <a:p>
-            <a:r>
-              <a:t>UN/Turtle Bay South → JFK 524 单，</a:t>
-            </a:r>
-          </a:p>
-          <a:p>
-            <a:r>
-              <a:t>East Harlem South → LaGuardia 489 单，</a:t>
-            </a:r>
-          </a:p>
-          <a:p>
-            <a:r>
-              <a:t>Kips Bay → JFK 292 单。</a:t>
-            </a:r>
-          </a:p>
-          <a:p/>
-          <a:p>
-            <a:r>
-              <a:t>第 6 到 15 条则是 Manhattan 内部住宅区到商务区</a:t>
-            </a:r>
-          </a:p>
-          <a:p>
-            <a:r>
-              <a:t>（Midtown、Times Sq、Penn Station）的短途调度。</a:t>
-            </a:r>
-          </a:p>
-          <a:p/>
-          <a:p>
-            <a:r>
-              <a:t>这个 pattern \emph{非常符合直觉}——</a:t>
-            </a:r>
-          </a:p>
-          <a:p>
-            <a:r>
-              <a:t>说明 LP 学到的不是某种数学上漂亮但物理上奇怪的调度，</a:t>
-            </a:r>
-          </a:p>
-          <a:p>
-            <a:r>
-              <a:t>而是真实匹配城市出行结构的方案。</a:t>
-            </a:r>
-          </a:p>
-          <a:p>
-            <a:r>
-              <a:t>我们的模型解的解 \emph{可解释}，没有把车随机派到偏远 zone，</a:t>
-            </a:r>
-          </a:p>
-          <a:p>
-            <a:r>
-              <a:t>这是模型有效性的间接证据。</a:t>
+              <a:t>【实验结果】录制：调度对比 — 汤平之</a:t>
+            </a:r>
+          </a:p>
+          <a:p/>
+          <a:p>
+            <a:r>
+              <a:t>这是项目的核心结果，请大家仔细看图。</a:t>
+            </a:r>
+          </a:p>
+          <a:p/>
+          <a:p>
+            <a:r>
+              <a:t>柱状图分两组：上面是 24 个测试小时上的总未满足需求；</a:t>
+            </a:r>
+          </a:p>
+          <a:p>
+            <a:r>
+              <a:t>下面是空驶距离成本。</a:t>
+            </a:r>
+          </a:p>
+          <a:p>
+            <a:r>
+              <a:t>灰色是不调度、橙色是贪心、蓝色是 LP。</a:t>
+            </a:r>
+          </a:p>
+          <a:p/>
+          <a:p>
+            <a:r>
+              <a:t>第一个观察：蓝色和橙色在「未满足需求」上几乎重合，</a:t>
+            </a:r>
+          </a:p>
+          <a:p>
+            <a:r>
+              <a:t>都比灰色低很多。在 $\lambda = 20$ 的设置下，</a:t>
+            </a:r>
+          </a:p>
+          <a:p>
+            <a:r>
+              <a:t>24 个测试小时合计：贪心平均 unmet 845，LP 平均 unmet 852，</a:t>
+            </a:r>
+          </a:p>
+          <a:p>
+            <a:r>
+              <a:t>LP 比 greedy 只高 \emph{0.9 \%}，工程上等同于完全持平。</a:t>
+            </a:r>
+          </a:p>
+          <a:p/>
+          <a:p>
+            <a:r>
+              <a:t>真正有意思的是 \emph{成本}——你看下面那张图：</a:t>
+            </a:r>
+          </a:p>
+          <a:p>
+            <a:r>
+              <a:t>在 hour 13、14、17、18、19 这几个小时上，</a:t>
+            </a:r>
+          </a:p>
+          <a:p>
+            <a:r>
+              <a:t>蓝色明显比橙色矮一大截。</a:t>
+            </a:r>
+          </a:p>
+          <a:p>
+            <a:r>
+              <a:t>24 个测试小时合计：贪心平均 cost 3053 英里，LP 平均 cost 2597 英里，</a:t>
+            </a:r>
+          </a:p>
+          <a:p>
+            <a:r>
+              <a:t>LP 整体便宜 \emph{15 \%}。</a:t>
+            </a:r>
+          </a:p>
+          <a:p/>
+          <a:p>
+            <a:r>
+              <a:t>单看几个 peak 小时差距更显著：</a:t>
+            </a:r>
+          </a:p>
+          <a:p>
+            <a:r>
+              <a:t>hour 14，贪心要烧 5033 英里空驶，LP 只需要 1540 英里，</a:t>
+            </a:r>
+          </a:p>
+          <a:p>
+            <a:r>
+              <a:t>便宜了 3.3 倍；</a:t>
+            </a:r>
+          </a:p>
+          <a:p>
+            <a:r>
+              <a:t>hour 18 是 3197 vs 707，4.5 倍；</a:t>
+            </a:r>
+          </a:p>
+          <a:p>
+            <a:r>
+              <a:t>hour 17 是 921 vs 429，2.1 倍；</a:t>
+            </a:r>
+          </a:p>
+          <a:p>
+            <a:r>
+              <a:t>hour 4 甚至到 5.5 倍。</a:t>
+            </a:r>
+          </a:p>
+          <a:p/>
+          <a:p>
+            <a:r>
+              <a:t>一句话总结：LP 在和 greedy 几乎相同的真实服务水平下，</a:t>
+            </a:r>
+          </a:p>
+          <a:p>
+            <a:r>
+              <a:t>用全局路由把空驶成本压低 1.18 到 5.52 倍——</a:t>
+            </a:r>
+          </a:p>
+          <a:p>
+            <a:r>
+              <a:t>这是 LP \emph{全局最优} 相对贪心 \emph{局部贪婪} 的本质差异，</a:t>
+            </a:r>
+          </a:p>
+          <a:p>
+            <a:r>
+              <a:t>在每个测试小时上都 \emph{Pareto 占优或持平}。</a:t>
             </a:r>
           </a:p>
           <a:p/>
@@ -986,111 +1018,91 @@
           <a:lstStyle/>
           <a:p>
             <a:r>
-              <a:t>【Monte Carlo 稳健性】录制：汤平之</a:t>
-            </a:r>
-          </a:p>
-          <a:p/>
-          <a:p>
-            <a:r>
-              <a:t>既然预测一定有误差——</a:t>
-            </a:r>
-          </a:p>
-          <a:p>
-            <a:r>
-              <a:t>我们的历史均值 MAE 是 16.83 pickup，</a:t>
-            </a:r>
-          </a:p>
-          <a:p>
-            <a:r>
-              <a:t>这个误差是非平凡的——</a:t>
-            </a:r>
-          </a:p>
-          <a:p>
-            <a:r>
-              <a:t>我们要测一下：当真实需求偏离预测的时候，</a:t>
-            </a:r>
-          </a:p>
-          <a:p>
-            <a:r>
-              <a:t>我们 \emph{固定} 的 LP 调度方案 $X^*$ 会不会突然垮掉？</a:t>
-            </a:r>
-          </a:p>
-          <a:p/>
-          <a:p>
-            <a:r>
-              <a:t>实验设计：</a:t>
-            </a:r>
-          </a:p>
-          <a:p>
-            <a:r>
-              <a:t>把 LP 求出的调度方案 $X^*$ 锁住，不允许在每个场景下重新求解</a:t>
-            </a:r>
-          </a:p>
-          <a:p>
-            <a:r>
-              <a:t>（否则就成了「事后知道需求」的理想化偏差）；</a:t>
-            </a:r>
-          </a:p>
-          <a:p>
-            <a:r>
-              <a:t>然后对真实需求按 Poisson 分布采 200 次扰动，</a:t>
-            </a:r>
-          </a:p>
-          <a:p>
-            <a:r>
-              <a:t>在每个扰动场景下评估三种方案的指标。</a:t>
-            </a:r>
-          </a:p>
-          <a:p/>
-          <a:p>
-            <a:r>
-              <a:t>箱线图显示三件事：</a:t>
-            </a:r>
-          </a:p>
-          <a:p>
-            <a:r>
-              <a:t>第一，no rebalance 的 unmet 中位数在 261 左右，</a:t>
-            </a:r>
-          </a:p>
-          <a:p>
-            <a:r>
-              <a:t>q95 高达 288，明显劣势；</a:t>
-            </a:r>
-          </a:p>
-          <a:p>
-            <a:r>
-              <a:t>第二，greedy 的 unmet 中位数只有 17，q95 是 41；</a:t>
-            </a:r>
-          </a:p>
-          <a:p>
-            <a:r>
-              <a:t>第三，LP 的 unmet 中位数和 greedy 完全一致，</a:t>
-            </a:r>
-          </a:p>
-          <a:p>
-            <a:r>
-              <a:t>都是 17 左右，q95 也是 41。</a:t>
-            </a:r>
-          </a:p>
-          <a:p/>
-          <a:p>
-            <a:r>
-              <a:t>这说明 LP 在需求扰动下 \emph{依然稳健}，</a:t>
-            </a:r>
-          </a:p>
-          <a:p>
-            <a:r>
-              <a:t>没有因为预测稍微偏一点就崩溃。</a:t>
-            </a:r>
-          </a:p>
-          <a:p>
-            <a:r>
-              <a:t>而且别忘了 LP 比 greedy 的成本结构上更优——</a:t>
-            </a:r>
-          </a:p>
-          <a:p>
-            <a:r>
-              <a:t>这两个优势是 \emph{独立叠加} 的，不矛盾。</a:t>
+              <a:t>【实验结果】录制：top flows — 汤平之</a:t>
+            </a:r>
+          </a:p>
+          <a:p/>
+          <a:p>
+            <a:r>
+              <a:t>这张图把 24 个测试小时的 LP 调度矩阵 $X^*$ 累加起来，</a:t>
+            </a:r>
+          </a:p>
+          <a:p>
+            <a:r>
+              <a:t>挑出流量最大的 15 条 OD 边。</a:t>
+            </a:r>
+          </a:p>
+          <a:p>
+            <a:r>
+              <a:t>横条左边是源 zone 名字，右边是目的 zone 名字。</a:t>
+            </a:r>
+          </a:p>
+          <a:p/>
+          <a:p>
+            <a:r>
+              <a:t>我们可以看到，前 5 条高频路径几乎全部是 Manhattan 内部住宅区往机场的方向：</a:t>
+            </a:r>
+          </a:p>
+          <a:p>
+            <a:r>
+              <a:t>Murray Hill → JFK 累计调度 778 单，</a:t>
+            </a:r>
+          </a:p>
+          <a:p>
+            <a:r>
+              <a:t>Yorkville East → LaGuardia 553 单，</a:t>
+            </a:r>
+          </a:p>
+          <a:p>
+            <a:r>
+              <a:t>UN/Turtle Bay South → JFK 524 单，</a:t>
+            </a:r>
+          </a:p>
+          <a:p>
+            <a:r>
+              <a:t>East Harlem South → LaGuardia 489 单，</a:t>
+            </a:r>
+          </a:p>
+          <a:p>
+            <a:r>
+              <a:t>Kips Bay → JFK 292 单。</a:t>
+            </a:r>
+          </a:p>
+          <a:p/>
+          <a:p>
+            <a:r>
+              <a:t>第 6 到 15 条则是 Manhattan 内部住宅区到商务区</a:t>
+            </a:r>
+          </a:p>
+          <a:p>
+            <a:r>
+              <a:t>（Midtown、Times Sq、Penn Station）的短途调度。</a:t>
+            </a:r>
+          </a:p>
+          <a:p/>
+          <a:p>
+            <a:r>
+              <a:t>这个 pattern \emph{非常符合直觉}——</a:t>
+            </a:r>
+          </a:p>
+          <a:p>
+            <a:r>
+              <a:t>说明 LP 学到的不是某种数学上漂亮但物理上奇怪的调度，</a:t>
+            </a:r>
+          </a:p>
+          <a:p>
+            <a:r>
+              <a:t>而是真实匹配城市出行结构的方案。</a:t>
+            </a:r>
+          </a:p>
+          <a:p>
+            <a:r>
+              <a:t>我们的模型解的解 \emph{可解释}，没有把车随机派到偏远 zone，</a:t>
+            </a:r>
+          </a:p>
+          <a:p>
+            <a:r>
+              <a:t>这是模型有效性的间接证据。</a:t>
             </a:r>
           </a:p>
           <a:p/>
@@ -1166,116 +1178,116 @@
           <a:lstStyle/>
           <a:p>
             <a:r>
-              <a:t>【结论与局限】录制：汤平之</a:t>
-            </a:r>
-          </a:p>
-          <a:p/>
-          <a:p>
-            <a:r>
-              <a:t>我来总结结论与局限。</a:t>
-            </a:r>
-          </a:p>
-          <a:p/>
-          <a:p>
-            <a:r>
-              <a:t>结论：</a:t>
-            </a:r>
-          </a:p>
-          <a:p>
-            <a:r>
-              <a:t>在 24 个代表性测试小时上，LP 与贪心达到 \emph{相同的未满足需求} 水平，</a:t>
-            </a:r>
-          </a:p>
-          <a:p>
-            <a:r>
-              <a:t>但 LP 的 \emph{空驶成本平均低 2 到 5 倍}；</a:t>
-            </a:r>
-          </a:p>
-          <a:p>
-            <a:r>
-              <a:t>这一优势在 Monte Carlo 200 次扰动下保持稳定。</a:t>
-            </a:r>
-          </a:p>
-          <a:p>
-            <a:r>
-              <a:t>这支持了我们的论点：</a:t>
-            </a:r>
-          </a:p>
-          <a:p>
-            <a:r>
-              <a:t>\emph{即使没有实时车辆位置数据，仅凭 dropoff 流的 zone-hour 聚合也可以构造</a:t>
-            </a:r>
-          </a:p>
-          <a:p>
-            <a:r>
-              <a:t>相对贪心严格更优的调度策略}。</a:t>
-            </a:r>
-          </a:p>
-          <a:p/>
-          <a:p>
-            <a:r>
-              <a:t>同时我们要诚实地讲六个局限：</a:t>
-            </a:r>
-          </a:p>
-          <a:p>
-            <a:r>
-              <a:t>第一，dropoff 流只是供给代理，不是真实空车库存——</a:t>
-            </a:r>
-          </a:p>
-          <a:p>
-            <a:r>
-              <a:t>真实平台知道每辆车的实时位置；</a:t>
-            </a:r>
-          </a:p>
-          <a:p>
-            <a:r>
-              <a:t>第二，模型没有用天气、道路拥堵、大型活动等外生数据——</a:t>
-            </a:r>
-          </a:p>
-          <a:p>
-            <a:r>
-              <a:t>在体育赛事或暴雨时段，模型会显著偏差；</a:t>
-            </a:r>
-          </a:p>
-          <a:p>
-            <a:r>
-              <a:t>第三，LP 是连续 relaxation，$x_{ij}$ 是期望调度强度而不是真实车辆数——</a:t>
-            </a:r>
-          </a:p>
-          <a:p>
-            <a:r>
-              <a:t>部署时需要做一次取整 + 分配；</a:t>
-            </a:r>
-          </a:p>
-          <a:p>
-            <a:r>
-              <a:t>第四，成本矩阵基于历史 trip\_distance 中位数，没考虑实时路况；</a:t>
-            </a:r>
-          </a:p>
-          <a:p>
-            <a:r>
-              <a:t>第五，假设调度可以瞬时执行，忽略了驾驶时延；</a:t>
-            </a:r>
-          </a:p>
-          <a:p>
-            <a:r>
-              <a:t>第六，Ridge 不带 zone embedding，性能弱于强基线——</a:t>
-            </a:r>
-          </a:p>
-          <a:p>
-            <a:r>
-              <a:t>后续工作可以加入 zone-level 固定效应。</a:t>
-            </a:r>
-          </a:p>
-          <a:p/>
-          <a:p>
-            <a:r>
-              <a:t>完整代码和数据复现命令都在我们的 GitHub 仓库——</a:t>
-            </a:r>
-          </a:p>
-          <a:p>
-            <a:r>
-              <a:t>github.com/Wangxibin123/numerical\_methods\_2026。</a:t>
+              <a:t>【Monte Carlo 稳健性】录制：汤平之</a:t>
+            </a:r>
+          </a:p>
+          <a:p/>
+          <a:p>
+            <a:r>
+              <a:t>既然预测一定有误差——</a:t>
+            </a:r>
+          </a:p>
+          <a:p>
+            <a:r>
+              <a:t>我们的历史均值 MAE 是 16.83 pickup，</a:t>
+            </a:r>
+          </a:p>
+          <a:p>
+            <a:r>
+              <a:t>这个误差是非平凡的——</a:t>
+            </a:r>
+          </a:p>
+          <a:p>
+            <a:r>
+              <a:t>我们要测一下：当真实需求偏离预测的时候，</a:t>
+            </a:r>
+          </a:p>
+          <a:p>
+            <a:r>
+              <a:t>我们 \emph{固定} 的 LP 调度方案 $X^*$ 会不会突然垮掉？</a:t>
+            </a:r>
+          </a:p>
+          <a:p/>
+          <a:p>
+            <a:r>
+              <a:t>实验设计：</a:t>
+            </a:r>
+          </a:p>
+          <a:p>
+            <a:r>
+              <a:t>把 LP 求出的调度方案 $X^*$ 锁住，不允许在每个场景下重新求解</a:t>
+            </a:r>
+          </a:p>
+          <a:p>
+            <a:r>
+              <a:t>（否则就成了「事后知道需求」的理想化偏差）；</a:t>
+            </a:r>
+          </a:p>
+          <a:p>
+            <a:r>
+              <a:t>然后对真实需求按 Poisson 分布采 200 次扰动，</a:t>
+            </a:r>
+          </a:p>
+          <a:p>
+            <a:r>
+              <a:t>在每个扰动场景下评估三种方案的指标。</a:t>
+            </a:r>
+          </a:p>
+          <a:p/>
+          <a:p>
+            <a:r>
+              <a:t>箱线图显示三件事：</a:t>
+            </a:r>
+          </a:p>
+          <a:p>
+            <a:r>
+              <a:t>第一，no rebalance 的 unmet 中位数在 261 左右，</a:t>
+            </a:r>
+          </a:p>
+          <a:p>
+            <a:r>
+              <a:t>q95 高达 288，明显劣势；</a:t>
+            </a:r>
+          </a:p>
+          <a:p>
+            <a:r>
+              <a:t>第二，greedy 的 unmet 中位数大约 17，q95 是 41；</a:t>
+            </a:r>
+          </a:p>
+          <a:p>
+            <a:r>
+              <a:t>第三，LP 的 unmet 分布和 greedy 紧密重叠，</a:t>
+            </a:r>
+          </a:p>
+          <a:p>
+            <a:r>
+              <a:t>mean、median、q95 三个统计量都和 greedy 持平。</a:t>
+            </a:r>
+          </a:p>
+          <a:p/>
+          <a:p>
+            <a:r>
+              <a:t>这说明 LP 在需求扰动下 \emph{依然稳健}，</a:t>
+            </a:r>
+          </a:p>
+          <a:p>
+            <a:r>
+              <a:t>不会因为预测稍微偏一点就崩溃。</a:t>
+            </a:r>
+          </a:p>
+          <a:p>
+            <a:r>
+              <a:t>加上 §11 已经讲过的：LP 整体空驶成本比 greedy 低 15 \%。</a:t>
+            </a:r>
+          </a:p>
+          <a:p>
+            <a:r>
+              <a:t>这两个优势 \emph{独立叠加}——</a:t>
+            </a:r>
+          </a:p>
+          <a:p>
+            <a:r>
+              <a:t>Pareto 上 LP 是相对 greedy 严格不更差、严格不更贵的方案。</a:t>
             </a:r>
           </a:p>
           <a:p/>
@@ -1351,6 +1363,196 @@
           <a:lstStyle/>
           <a:p>
             <a:r>
+              <a:t>【结论与局限】录制：汤平之</a:t>
+            </a:r>
+          </a:p>
+          <a:p/>
+          <a:p>
+            <a:r>
+              <a:t>我来总结结论与局限。</a:t>
+            </a:r>
+          </a:p>
+          <a:p/>
+          <a:p>
+            <a:r>
+              <a:t>结论：</a:t>
+            </a:r>
+          </a:p>
+          <a:p>
+            <a:r>
+              <a:t>在 24 个代表性测试小时上，LP 的 unmet 仅比 greedy 高 \emph{0.9 \%}（工程上持平），</a:t>
+            </a:r>
+          </a:p>
+          <a:p>
+            <a:r>
+              <a:t>但 LP 的 \emph{平均空驶成本比 greedy 低 15 \%}，</a:t>
+            </a:r>
+          </a:p>
+          <a:p>
+            <a:r>
+              <a:t>单个 peak 小时降幅最高达 5.5 倍；</a:t>
+            </a:r>
+          </a:p>
+          <a:p>
+            <a:r>
+              <a:t>这一优势在 Monte Carlo 200 次需求扰动下保持稳定。</a:t>
+            </a:r>
+          </a:p>
+          <a:p>
+            <a:r>
+              <a:t>这支持了我们的论点：</a:t>
+            </a:r>
+          </a:p>
+          <a:p>
+            <a:r>
+              <a:t>\emph{即使没有实时车辆位置数据，仅凭 dropoff 流的 zone-hour 聚合</a:t>
+            </a:r>
+          </a:p>
+          <a:p>
+            <a:r>
+              <a:t>也可以构造在 Pareto 意义上严格优于贪心的调度策略}。</a:t>
+            </a:r>
+          </a:p>
+          <a:p/>
+          <a:p>
+            <a:r>
+              <a:t>同时我们要诚实地讲六个局限：</a:t>
+            </a:r>
+          </a:p>
+          <a:p>
+            <a:r>
+              <a:t>第一，dropoff 流只是供给代理，不是真实空车库存——</a:t>
+            </a:r>
+          </a:p>
+          <a:p>
+            <a:r>
+              <a:t>真实平台知道每辆车的实时位置；</a:t>
+            </a:r>
+          </a:p>
+          <a:p>
+            <a:r>
+              <a:t>第二，模型没有用天气、道路拥堵、大型活动等外生数据——</a:t>
+            </a:r>
+          </a:p>
+          <a:p>
+            <a:r>
+              <a:t>在体育赛事或暴雨时段，模型会显著偏差；</a:t>
+            </a:r>
+          </a:p>
+          <a:p>
+            <a:r>
+              <a:t>第三，LP 是连续 relaxation，$x_{ij}$ 是期望调度强度而不是真实车辆数——</a:t>
+            </a:r>
+          </a:p>
+          <a:p>
+            <a:r>
+              <a:t>部署时需要做一次取整 + 分配；</a:t>
+            </a:r>
+          </a:p>
+          <a:p>
+            <a:r>
+              <a:t>第四，成本矩阵基于历史 trip\_distance 中位数，没考虑实时路况；</a:t>
+            </a:r>
+          </a:p>
+          <a:p>
+            <a:r>
+              <a:t>第五，假设调度可以瞬时执行，忽略了驾驶时延；</a:t>
+            </a:r>
+          </a:p>
+          <a:p>
+            <a:r>
+              <a:t>第六，Ridge 不带 zone embedding，性能弱于强基线——</a:t>
+            </a:r>
+          </a:p>
+          <a:p>
+            <a:r>
+              <a:t>后续工作可以加入 zone-level 固定效应。</a:t>
+            </a:r>
+          </a:p>
+          <a:p/>
+          <a:p>
+            <a:r>
+              <a:t>完整代码和数据复现命令都在我们的 GitHub 仓库——</a:t>
+            </a:r>
+          </a:p>
+          <a:p>
+            <a:r>
+              <a:t>github.com/Wangxibin123/numerical\_methods\_2026。</a:t>
+            </a:r>
+          </a:p>
+          <a:p/>
+          <a:p>
+            <a:r>
+              <a:t>---</a:t>
+            </a:r>
+          </a:p>
+        </p:txBody>
+      </p:sp>
+      <p:sp>
+        <p:nvSpPr>
+          <p:cNvPr id="4" name="Slide Number Placeholder 3"/>
+          <p:cNvSpPr>
+            <a:spLocks noGrp="1"/>
+          </p:cNvSpPr>
+          <p:nvPr>
+            <p:ph type="sldNum" idx="5" sz="quarter"/>
+          </p:nvPr>
+        </p:nvSpPr>
+        <p:spPr/>
+      </p:sp>
+    </p:spTree>
+  </p:cSld>
+  <p:clrMapOvr>
+    <a:masterClrMapping/>
+  </p:clrMapOvr>
+</p:notes>
+</file>
+
+<file path=ppt/notesSlides/notesSlide15.xml><?xml version="1.0" encoding="utf-8"?>
+<p:notes xmlns:a="http://schemas.openxmlformats.org/drawingml/2006/main" xmlns:p="http://schemas.openxmlformats.org/presentationml/2006/main" xmlns:r="http://schemas.openxmlformats.org/officeDocument/2006/relationships">
+  <p:cSld>
+    <p:spTree>
+      <p:nvGrpSpPr>
+        <p:cNvPr id="1" name=""/>
+        <p:cNvGrpSpPr/>
+        <p:nvPr/>
+      </p:nvGrpSpPr>
+      <p:grpSpPr>
+        <a:xfrm>
+          <a:off x="0" y="0"/>
+          <a:ext cx="0" cy="0"/>
+          <a:chOff x="0" y="0"/>
+          <a:chExt cx="0" cy="0"/>
+        </a:xfrm>
+      </p:grpSpPr>
+      <p:sp>
+        <p:nvSpPr>
+          <p:cNvPr id="2" name="Slide Image Placeholder 1"/>
+          <p:cNvSpPr>
+            <a:spLocks noGrp="1"/>
+          </p:cNvSpPr>
+          <p:nvPr>
+            <p:ph type="sldImg" idx="2"/>
+          </p:nvPr>
+        </p:nvSpPr>
+        <p:spPr/>
+      </p:sp>
+      <p:sp>
+        <p:nvSpPr>
+          <p:cNvPr id="3" name="Notes Placeholder 2"/>
+          <p:cNvSpPr>
+            <a:spLocks noGrp="1"/>
+          </p:cNvSpPr>
+          <p:nvPr>
+            <p:ph type="body" idx="3" sz="quarter"/>
+          </p:nvPr>
+        </p:nvSpPr>
+        <p:spPr/>
+        <p:txBody>
+          <a:bodyPr/>
+          <a:lstStyle/>
+          <a:p>
+            <a:r>
               <a:t>【致谢】录制：汤平之</a:t>
             </a:r>
           </a:p>
@@ -1426,42 +1628,47 @@
           </a:p>
           <a:p>
             <a:r>
-              <a:t>| 8 | 汤平之 | 80 |</a:t>
-            </a:r>
-          </a:p>
-          <a:p>
-            <a:r>
-              <a:t>| 9 | 汤平之 | 90 |</a:t>
-            </a:r>
-          </a:p>
-          <a:p>
-            <a:r>
-              <a:t>| 10 | 汤平之 | 120 |</a:t>
-            </a:r>
-          </a:p>
-          <a:p>
-            <a:r>
-              <a:t>| 11 | 汤平之 | 75 |</a:t>
-            </a:r>
-          </a:p>
-          <a:p>
-            <a:r>
-              <a:t>| 12 | 汤平之 | 90 |</a:t>
-            </a:r>
-          </a:p>
-          <a:p>
-            <a:r>
-              <a:t>| 13 | 汤平之 | 100 |</a:t>
-            </a:r>
-          </a:p>
-          <a:p>
-            <a:r>
-              <a:t>| 14 | 汤平之 | 15 |</a:t>
-            </a:r>
-          </a:p>
-          <a:p>
-            <a:r>
-              <a:t>| **合计** | | **1150 s ≈ 19 min** |</a:t>
+              <a:t>| 8 | 陈龙 | 110 |</a:t>
+            </a:r>
+          </a:p>
+          <a:p>
+            <a:r>
+              <a:t>| 9 | 汤平之 | 80 |</a:t>
+            </a:r>
+          </a:p>
+          <a:p>
+            <a:r>
+              <a:t>| 10 | 汤平之 | 90 |</a:t>
+            </a:r>
+          </a:p>
+          <a:p>
+            <a:r>
+              <a:t>| 11 | 汤平之 | 120 |</a:t>
+            </a:r>
+          </a:p>
+          <a:p>
+            <a:r>
+              <a:t>| 12 | 汤平之 | 75 |</a:t>
+            </a:r>
+          </a:p>
+          <a:p>
+            <a:r>
+              <a:t>| 13 | 汤平之 | 90 |</a:t>
+            </a:r>
+          </a:p>
+          <a:p>
+            <a:r>
+              <a:t>| 14 | 汤平之 | 100 |</a:t>
+            </a:r>
+          </a:p>
+          <a:p>
+            <a:r>
+              <a:t>| 15 | 汤平之 | 15 |</a:t>
+            </a:r>
+          </a:p>
+          <a:p>
+            <a:r>
+              <a:t>| **合计** | | **1260 s ≈ 21 min** |</a:t>
             </a:r>
           </a:p>
           <a:p/>
@@ -2525,6 +2732,11 @@
               <a:t>后半段由汤平之同学接着讲基线对比和实验结果。</a:t>
             </a:r>
           </a:p>
+          <a:p>
+            <a:r>
+              <a:t>不过在交接之前，我先用一页讲清楚我们怎么选 $\lambda$ 这个关键参数。</a:t>
+            </a:r>
+          </a:p>
           <a:p/>
           <a:p>
             <a:r>
@@ -2598,88 +2810,141 @@
           <a:lstStyle/>
           <a:p>
             <a:r>
-              <a:t>【Baselines】录制：汤平之</a:t>
-            </a:r>
-          </a:p>
-          <a:p/>
-          <a:p>
-            <a:r>
-              <a:t>谢谢龙哥。接下来我接力讲后半段。</a:t>
-            </a:r>
-          </a:p>
-          <a:p/>
-          <a:p>
-            <a:r>
-              <a:t>一个 LP 摆在这里说「我最优」是没说服力的，</a:t>
-            </a:r>
-          </a:p>
-          <a:p>
-            <a:r>
-              <a:t>必须有至少两个基线作为参照。所以我们做了三种调度策略一起跑：</a:t>
-            </a:r>
-          </a:p>
-          <a:p/>
-          <a:p>
-            <a:r>
-              <a:t>第一种是 \emph{不调度}，$X = 0$，作为最基础对照组。</a:t>
-            </a:r>
-          </a:p>
-          <a:p>
-            <a:r>
-              <a:t>它的含义是：我们什么都不做，所有缺口区域的未满足需求就是真实的客户流失。</a:t>
-            </a:r>
-          </a:p>
-          <a:p>
-            <a:r>
-              <a:t>它给我们一个上限——「最差情况」。</a:t>
-            </a:r>
-          </a:p>
-          <a:p/>
-          <a:p>
-            <a:r>
-              <a:t>第二种是 \emph{贪心最近邻}：</a:t>
-            </a:r>
-          </a:p>
-          <a:p>
-            <a:r>
-              <a:t>按缺口大小从大到小遍历缺口 zone，</a:t>
-            </a:r>
-          </a:p>
-          <a:p>
-            <a:r>
-              <a:t>每次从最便宜的剩余供给 zone 调过来，直到本 zone 缺口填满或供给用完。</a:t>
-            </a:r>
-          </a:p>
-          <a:p>
-            <a:r>
-              <a:t>它是一个非常直觉、但 \emph{短视} 的策略——</a:t>
-            </a:r>
-          </a:p>
-          <a:p>
-            <a:r>
-              <a:t>因为每次只看局部最优，不考虑「便宜路径被这次填用了下次怎么办」。</a:t>
-            </a:r>
-          </a:p>
-          <a:p/>
-          <a:p>
-            <a:r>
-              <a:t>第三种是我们的主方法：\emph{LP 全局最优}，用北太天元的 \verb|linprog| 求解。</a:t>
-            </a:r>
-          </a:p>
-          <a:p>
-            <a:r>
-              <a:t>它会同时考虑所有 zone 的全局路由，找到 cost-quality 的真正最优解。</a:t>
-            </a:r>
-          </a:p>
-          <a:p/>
-          <a:p>
-            <a:r>
-              <a:t>等会儿你会看到这三种方法在 24 个测试小时上的对比图，</a:t>
-            </a:r>
-          </a:p>
-          <a:p>
-            <a:r>
-              <a:t>直观显示 LP 相对贪心的 \emph{结构性} 优势。</a:t>
+              <a:t>【$\lambda$ 的经济学依据】录制：陈龙</a:t>
+            </a:r>
+          </a:p>
+          <a:p/>
+          <a:p>
+            <a:r>
+              <a:t>上一页留了个尾巴：$\lambda$ 到底取多少？</a:t>
+            </a:r>
+          </a:p>
+          <a:p>
+            <a:r>
+              <a:t>我们没有靠 “拍脑袋” 拍一个，而是从 NYC TLC 公开的 2024 Yellow Taxi 标准费率出发，</a:t>
+            </a:r>
+          </a:p>
+          <a:p>
+            <a:r>
+              <a:t>给出 \emph{经济学上可辩护} 的区间。</a:t>
+            </a:r>
+          </a:p>
+          <a:p/>
+          <a:p>
+            <a:r>
+              <a:t>关键参数有两个：</a:t>
+            </a:r>
+          </a:p>
+          <a:p>
+            <a:r>
+              <a:t>一是司机一趟典型 Manhattan 行程的净收入——</a:t>
+            </a:r>
+          </a:p>
+          <a:p>
+            <a:r>
+              <a:t>标准费率是起步价 3 美元加每英里 3.5 美元，</a:t>
+            </a:r>
+          </a:p>
+          <a:p>
+            <a:r>
+              <a:t>一趟 2.5 英里、含 MTA 税、congestion 附加的行程总费用约 18 美元，</a:t>
+            </a:r>
+          </a:p>
+          <a:p>
+            <a:r>
+              <a:t>扣公司分成后司机入袋约 12 美元；</a:t>
+            </a:r>
+          </a:p>
+          <a:p>
+            <a:r>
+              <a:t>二是司机的单位空驶成本——</a:t>
+            </a:r>
+          </a:p>
+          <a:p>
+            <a:r>
+              <a:t>燃油按 18 mpg 算约 0.20 美元每英里，</a:t>
+            </a:r>
+          </a:p>
+          <a:p>
+            <a:r>
+              <a:t>加维护、折旧约 0.40 美元每英里。</a:t>
+            </a:r>
+          </a:p>
+          <a:p/>
+          <a:p>
+            <a:r>
+              <a:t>由此得到三个视角的 $\lambda$ 估计：</a:t>
+            </a:r>
+          </a:p>
+          <a:p>
+            <a:r>
+              <a:t>司机视角：12 ÷ 0.40 ≈ 30 英里——也就是为了不损失这 12 美元，</a:t>
+            </a:r>
+          </a:p>
+          <a:p>
+            <a:r>
+              <a:t>司机愿意多空驶 30 英里；</a:t>
+            </a:r>
+          </a:p>
+          <a:p>
+            <a:r>
+              <a:t>社会视角：把客户机会成本 5 美元加进去，</a:t>
+            </a:r>
+          </a:p>
+          <a:p>
+            <a:r>
+              <a:t>得到大约 42 英里；</a:t>
+            </a:r>
+          </a:p>
+          <a:p>
+            <a:r>
+              <a:t>平台视角：用折扣率回报法算大约 20 到 25 英里。</a:t>
+            </a:r>
+          </a:p>
+          <a:p/>
+          <a:p>
+            <a:r>
+              <a:t>综合起来，可辩护区间是 $\lambda \in [20, 42]$。</a:t>
+            </a:r>
+          </a:p>
+          <a:p>
+            <a:r>
+              <a:t>我们默认取下界 $\lambda = 20$，</a:t>
+            </a:r>
+          </a:p>
+          <a:p>
+            <a:r>
+              <a:t>然后在 20 个 $\lambda$ 值的 sensitivity sweep 上验证——</a:t>
+            </a:r>
+          </a:p>
+          <a:p>
+            <a:r>
+              <a:t>不只跑一个测试小时，而是 \emph{在全部 24 个测试小时上取平均}。</a:t>
+            </a:r>
+          </a:p>
+          <a:p>
+            <a:r>
+              <a:t>结果发现：$\lambda \le 5$ 时 LP 几乎不调度，</a:t>
+            </a:r>
+          </a:p>
+          <a:p>
+            <a:r>
+              <a:t>$\lambda \in [10, 20]$ 是转折区，</a:t>
+            </a:r>
+          </a:p>
+          <a:p>
+            <a:r>
+              <a:t>而 $\lambda \in [20, 200]$ 的整个区间都 \emph{饱和} 在同一个最优解上——</a:t>
+            </a:r>
+          </a:p>
+          <a:p>
+            <a:r>
+              <a:t>这意味着我们的可辩护区间 $[20, 42]$ 完全落在饱和带，</a:t>
+            </a:r>
+          </a:p>
+          <a:p>
+            <a:r>
+              <a:t>参数选择对最终结论 \emph{鲁棒}。</a:t>
             </a:r>
           </a:p>
           <a:p/>
@@ -2755,107 +3020,88 @@
           <a:lstStyle/>
           <a:p>
             <a:r>
-              <a:t>【北太天元实现流程】录制：汤平之</a:t>
-            </a:r>
-          </a:p>
-          <a:p/>
-          <a:p>
-            <a:r>
-              <a:t>这一页我讲整个北太天元侧的实现流程，因为这是项目要求的主求解工具。</a:t>
-            </a:r>
-          </a:p>
-          <a:p/>
-          <a:p>
-            <a:r>
-              <a:t>整个流水线由 \verb|run_all.m| 一键串联，</a:t>
-            </a:r>
-          </a:p>
-          <a:p>
-            <a:r>
-              <a:t>大约 130 行代码，做了 12 件事：</a:t>
-            </a:r>
-          </a:p>
-          <a:p/>
-          <a:p>
-            <a:r>
-              <a:t>第一步，读取 Python 输出的 7 个 processed CSV，</a:t>
-            </a:r>
-          </a:p>
-          <a:p>
-            <a:r>
-              <a:t>包括 109,250 行的面板、50×50 的 cost 矩阵、zone 元信息等。</a:t>
-            </a:r>
-          </a:p>
-          <a:p>
-            <a:r>
-              <a:t>这一步有一个有意思的兼容性坑——Baltamatica 2025 社区版的</a:t>
-            </a:r>
-          </a:p>
-          <a:p>
-            <a:r>
-              <a:t>\verb|csvread| 在多行加尾部换行时会丢行而且数值错乱，</a:t>
-            </a:r>
-          </a:p>
-          <a:p>
-            <a:r>
-              <a:t>我们改用 \verb|fopen + fread + sscanf| 自实现快速读取，</a:t>
-            </a:r>
-          </a:p>
-          <a:p>
-            <a:r>
-              <a:t>比 \verb|readtable| 快 30 倍。这些踩坑过程都记在 \verb|docs/beita_usage_notes.md|。</a:t>
-            </a:r>
-          </a:p>
-          <a:p/>
-          <a:p>
-            <a:r>
-              <a:t>第二步是验证 train / val / test 切分是 70 / 15 / 15，</a:t>
-            </a:r>
-          </a:p>
-          <a:p>
-            <a:r>
-              <a:t>第三步同时拟合历史均值和 Ridge 两个预测器。</a:t>
-            </a:r>
-          </a:p>
-          <a:p>
-            <a:r>
-              <a:t>第四步对每个测试小时构造 $S, D, C$，</a:t>
-            </a:r>
-          </a:p>
-          <a:p>
-            <a:r>
-              <a:t>同时跑不调度、贪心、LP 三种方案。</a:t>
-            </a:r>
-          </a:p>
-          <a:p>
-            <a:r>
-              <a:t>第五步是 $\lambda$ 敏感性扫描，10 个 $\lambda$ 值。</a:t>
-            </a:r>
-          </a:p>
-          <a:p>
-            <a:r>
-              <a:t>第六步是 Monte Carlo 200 次需求扰动稳健性测试。</a:t>
-            </a:r>
-          </a:p>
-          <a:p>
-            <a:r>
-              <a:t>第七步把 5 张图所需的数据导出成 CSV，</a:t>
-            </a:r>
-          </a:p>
-          <a:p>
-            <a:r>
-              <a:t>交给 Python matplotlib 渲染最终 PNG。</a:t>
-            </a:r>
-          </a:p>
-          <a:p/>
-          <a:p>
-            <a:r>
-              <a:t>这一分工保证 \emph{所有数学和优化都在北太天元里}，</a:t>
-            </a:r>
-          </a:p>
-          <a:p>
-            <a:r>
-              <a:t>Python 只做像素渲染，完全符合作业要求。</a:t>
+              <a:t>【Baselines】录制：汤平之</a:t>
+            </a:r>
+          </a:p>
+          <a:p/>
+          <a:p>
+            <a:r>
+              <a:t>谢谢龙哥。接下来我接力讲后半段。</a:t>
+            </a:r>
+          </a:p>
+          <a:p/>
+          <a:p>
+            <a:r>
+              <a:t>一个 LP 摆在这里说「我最优」是没说服力的，</a:t>
+            </a:r>
+          </a:p>
+          <a:p>
+            <a:r>
+              <a:t>必须有至少两个基线作为参照。所以我们做了三种调度策略一起跑：</a:t>
+            </a:r>
+          </a:p>
+          <a:p/>
+          <a:p>
+            <a:r>
+              <a:t>第一种是 \emph{不调度}，$X = 0$，作为最基础对照组。</a:t>
+            </a:r>
+          </a:p>
+          <a:p>
+            <a:r>
+              <a:t>它的含义是：我们什么都不做，所有缺口区域的未满足需求就是真实的客户流失。</a:t>
+            </a:r>
+          </a:p>
+          <a:p>
+            <a:r>
+              <a:t>它给我们一个上限——「最差情况」。</a:t>
+            </a:r>
+          </a:p>
+          <a:p/>
+          <a:p>
+            <a:r>
+              <a:t>第二种是 \emph{贪心最近邻}：</a:t>
+            </a:r>
+          </a:p>
+          <a:p>
+            <a:r>
+              <a:t>按缺口大小从大到小遍历缺口 zone，</a:t>
+            </a:r>
+          </a:p>
+          <a:p>
+            <a:r>
+              <a:t>每次从最便宜的剩余供给 zone 调过来，直到本 zone 缺口填满或供给用完。</a:t>
+            </a:r>
+          </a:p>
+          <a:p>
+            <a:r>
+              <a:t>它是一个非常直觉、但 \emph{短视} 的策略——</a:t>
+            </a:r>
+          </a:p>
+          <a:p>
+            <a:r>
+              <a:t>因为每次只看局部最优，不考虑「便宜路径被这次填用了下次怎么办」。</a:t>
+            </a:r>
+          </a:p>
+          <a:p/>
+          <a:p>
+            <a:r>
+              <a:t>第三种是我们的主方法：\emph{LP 全局最优}，用北太天元的 \verb|linprog| 求解。</a:t>
+            </a:r>
+          </a:p>
+          <a:p>
+            <a:r>
+              <a:t>它会同时考虑所有 zone 的全局路由，找到 cost-quality 的真正最优解。</a:t>
+            </a:r>
+          </a:p>
+          <a:p/>
+          <a:p>
+            <a:r>
+              <a:t>等会儿你会看到这三种方法在 24 个测试小时上的对比图，</a:t>
+            </a:r>
+          </a:p>
+          <a:p>
+            <a:r>
+              <a:t>直观显示 LP 相对贪心的 \emph{结构性} 优势。</a:t>
             </a:r>
           </a:p>
           <a:p/>
@@ -6080,6 +6326,48 @@
       <p:pic>
         <p:nvPicPr>
           <p:cNvPr id="2" name="Picture 1" descr="slide-14.png"/>
+          <p:cNvPicPr>
+            <a:picLocks noChangeAspect="1"/>
+          </p:cNvPicPr>
+          <p:nvPr/>
+        </p:nvPicPr>
+        <p:blipFill>
+          <a:blip r:embed="rId2"/>
+          <a:stretch>
+            <a:fillRect/>
+          </a:stretch>
+        </p:blipFill>
+        <p:spPr>
+          <a:xfrm>
+            <a:off x="0" y="0"/>
+            <a:ext cx="12191695" cy="6858000"/>
+          </a:xfrm>
+          <a:prstGeom prst="rect">
+            <a:avLst/>
+          </a:prstGeom>
+        </p:spPr>
+      </p:pic>
+    </p:spTree>
+  </p:cSld>
+  <p:clrMapOvr>
+    <a:masterClrMapping/>
+  </p:clrMapOvr>
+</p:sld>
+</file>
+
+<file path=ppt/slides/slide15.xml><?xml version="1.0" encoding="utf-8"?>
+<p:sld xmlns:a="http://schemas.openxmlformats.org/drawingml/2006/main" xmlns:p="http://schemas.openxmlformats.org/presentationml/2006/main" xmlns:r="http://schemas.openxmlformats.org/officeDocument/2006/relationships">
+  <p:cSld>
+    <p:spTree>
+      <p:nvGrpSpPr>
+        <p:cNvPr id="1" name=""/>
+        <p:cNvGrpSpPr/>
+        <p:nvPr/>
+      </p:nvGrpSpPr>
+      <p:grpSpPr/>
+      <p:pic>
+        <p:nvPicPr>
+          <p:cNvPr id="2" name="Picture 1" descr="slide-15.png"/>
           <p:cNvPicPr>
             <a:picLocks noChangeAspect="1"/>
           </p:cNvPicPr>
